--- a/docs/presentation/심어봄_중간발표_2026-08-12.pptx
+++ b/docs/presentation/심어봄_중간발표_2026-08-12.pptx
@@ -2,22 +2,22 @@
 <file path=ppt/presentation.xml><?xml version="1.0" encoding="utf-8"?>
 <p:presentation xmlns:p="http://schemas.openxmlformats.org/presentationml/2006/main">
   <p:sldMasterIdLst>
-    <p:sldMasterId xmlns:r="http://schemas.openxmlformats.org/officeDocument/2006/relationships" id="2147483648" r:id="R57554b928b1c4336"/>
+    <p:sldMasterId xmlns:r="http://schemas.openxmlformats.org/officeDocument/2006/relationships" id="2147483648" r:id="R46d5b923e80346c6"/>
   </p:sldMasterIdLst>
   <p:notesMasterIdLst>
-    <p:notesMasterId xmlns:r="http://schemas.openxmlformats.org/officeDocument/2006/relationships" r:id="R097eebec34b3439c"/>
+    <p:notesMasterId xmlns:r="http://schemas.openxmlformats.org/officeDocument/2006/relationships" r:id="R53543294e1484ad6"/>
   </p:notesMasterIdLst>
   <p:sldIdLst>
-    <p:sldId xmlns:r="http://schemas.openxmlformats.org/officeDocument/2006/relationships" id="256" r:id="Re1fedc1a8f30469c"/>
-    <p:sldId xmlns:r="http://schemas.openxmlformats.org/officeDocument/2006/relationships" id="257" r:id="R28935b930e6b4d85"/>
-    <p:sldId xmlns:r="http://schemas.openxmlformats.org/officeDocument/2006/relationships" id="258" r:id="Rc18950b33217467e"/>
-    <p:sldId xmlns:r="http://schemas.openxmlformats.org/officeDocument/2006/relationships" id="259" r:id="R957fbe52e53648cd"/>
-    <p:sldId xmlns:r="http://schemas.openxmlformats.org/officeDocument/2006/relationships" id="260" r:id="Rafb104e1f6514149"/>
-    <p:sldId xmlns:r="http://schemas.openxmlformats.org/officeDocument/2006/relationships" id="261" r:id="R4a3712fe0f3d449f"/>
-    <p:sldId xmlns:r="http://schemas.openxmlformats.org/officeDocument/2006/relationships" id="262" r:id="Rd9aee5c7e10347bb"/>
-    <p:sldId xmlns:r="http://schemas.openxmlformats.org/officeDocument/2006/relationships" id="263" r:id="R96659190cd46426d"/>
-    <p:sldId xmlns:r="http://schemas.openxmlformats.org/officeDocument/2006/relationships" id="264" r:id="Rbc3963e366314d6c"/>
-    <p:sldId xmlns:r="http://schemas.openxmlformats.org/officeDocument/2006/relationships" id="265" r:id="R46ffc2724b05434f"/>
+    <p:sldId xmlns:r="http://schemas.openxmlformats.org/officeDocument/2006/relationships" id="256" r:id="R7b250680c9784009"/>
+    <p:sldId xmlns:r="http://schemas.openxmlformats.org/officeDocument/2006/relationships" id="257" r:id="R104b22d6f7874161"/>
+    <p:sldId xmlns:r="http://schemas.openxmlformats.org/officeDocument/2006/relationships" id="258" r:id="R83f0aa859cfe4555"/>
+    <p:sldId xmlns:r="http://schemas.openxmlformats.org/officeDocument/2006/relationships" id="259" r:id="Rb4d70812efb74b7a"/>
+    <p:sldId xmlns:r="http://schemas.openxmlformats.org/officeDocument/2006/relationships" id="260" r:id="Rfb95e6929fac490b"/>
+    <p:sldId xmlns:r="http://schemas.openxmlformats.org/officeDocument/2006/relationships" id="261" r:id="Rcf2d922993af4bbe"/>
+    <p:sldId xmlns:r="http://schemas.openxmlformats.org/officeDocument/2006/relationships" id="262" r:id="R93a1f9eddb29458c"/>
+    <p:sldId xmlns:r="http://schemas.openxmlformats.org/officeDocument/2006/relationships" id="263" r:id="Rf379ca443a6e44c3"/>
+    <p:sldId xmlns:r="http://schemas.openxmlformats.org/officeDocument/2006/relationships" id="264" r:id="R005ac3078c574b50"/>
+    <p:sldId xmlns:r="http://schemas.openxmlformats.org/officeDocument/2006/relationships" id="265" r:id="Rd15df896c7a64371"/>
   </p:sldIdLst>
   <p:sldSz cx="12192000" cy="6858000"/>
   <p:notesSz cx="6858000" cy="9144000"/>
@@ -1474,7 +1474,7 @@
   </p:cSld>
   <p:clrMap bg1="lt1" tx1="dk1" bg2="lt2" tx2="dk2" accent1="accent1" accent2="accent2" accent3="accent3" accent4="accent4" accent5="accent5" accent6="accent6" hlink="hlink" folHlink="folHlink"/>
   <p:sldLayoutIdLst>
-    <p:sldLayoutId xmlns:r="http://schemas.openxmlformats.org/officeDocument/2006/relationships" id="2147483649" r:id="Rb75230537e3c49b2"/>
+    <p:sldLayoutId xmlns:r="http://schemas.openxmlformats.org/officeDocument/2006/relationships" id="2147483649" r:id="Rfb4e265d428a4089"/>
   </p:sldLayoutIdLst>
   <p:txStyles>
     <p:titleStyle>
@@ -2088,6 +2088,7 @@
           <a:lstStyle xmlns:a="http://schemas.openxmlformats.org/drawingml/2006/main"/>
           <a:p xmlns:a="http://schemas.openxmlformats.org/drawingml/2006/main">
             <a:pPr algn="l">
+              <a:buNone/>
               <a:defRPr sz="1200" b="1">
                 <a:solidFill>
                   <a:srgbClr val="0C9769"/>
@@ -2146,6 +2147,7 @@
           <a:lstStyle xmlns:a="http://schemas.openxmlformats.org/drawingml/2006/main"/>
           <a:p xmlns:a="http://schemas.openxmlformats.org/drawingml/2006/main">
             <a:pPr algn="l">
+              <a:buNone/>
               <a:defRPr sz="5250" b="1">
                 <a:solidFill>
                   <a:srgbClr val="102E24"/>
@@ -2204,6 +2206,7 @@
           <a:lstStyle xmlns:a="http://schemas.openxmlformats.org/drawingml/2006/main"/>
           <a:p xmlns:a="http://schemas.openxmlformats.org/drawingml/2006/main">
             <a:pPr algn="l">
+              <a:buNone/>
               <a:defRPr sz="3150" b="1">
                 <a:solidFill>
                   <a:srgbClr val="102E24"/>
@@ -2227,6 +2230,7 @@
           </a:p>
           <a:p xmlns:a="http://schemas.openxmlformats.org/drawingml/2006/main">
             <a:pPr algn="l">
+              <a:buNone/>
               <a:defRPr sz="3150" b="1">
                 <a:solidFill>
                   <a:srgbClr val="102E24"/>
@@ -2285,6 +2289,7 @@
           <a:lstStyle xmlns:a="http://schemas.openxmlformats.org/drawingml/2006/main"/>
           <a:p xmlns:a="http://schemas.openxmlformats.org/drawingml/2006/main">
             <a:pPr algn="l">
+              <a:buNone/>
               <a:defRPr sz="1500" b="0">
                 <a:solidFill>
                   <a:srgbClr val="60736B"/>
@@ -2378,6 +2383,7 @@
           <a:lstStyle xmlns:a="http://schemas.openxmlformats.org/drawingml/2006/main"/>
           <a:p xmlns:a="http://schemas.openxmlformats.org/drawingml/2006/main">
             <a:pPr algn="l">
+              <a:buNone/>
               <a:defRPr sz="1125" b="1">
                 <a:solidFill>
                   <a:srgbClr val="F2A93B"/>
@@ -2436,6 +2442,7 @@
           <a:lstStyle xmlns:a="http://schemas.openxmlformats.org/drawingml/2006/main"/>
           <a:p xmlns:a="http://schemas.openxmlformats.org/drawingml/2006/main">
             <a:pPr algn="l">
+              <a:buNone/>
               <a:defRPr sz="6900" b="1">
                 <a:solidFill>
                   <a:srgbClr val="FFFFFF"/>
@@ -2494,6 +2501,7 @@
           <a:lstStyle xmlns:a="http://schemas.openxmlformats.org/drawingml/2006/main"/>
           <a:p xmlns:a="http://schemas.openxmlformats.org/drawingml/2006/main">
             <a:pPr algn="l">
+              <a:buNone/>
               <a:defRPr sz="1950" b="1">
                 <a:solidFill>
                   <a:srgbClr val="FFFFFF"/>
@@ -2517,6 +2525,7 @@
           </a:p>
           <a:p xmlns:a="http://schemas.openxmlformats.org/drawingml/2006/main">
             <a:pPr algn="l">
+              <a:buNone/>
               <a:defRPr sz="1950" b="1">
                 <a:solidFill>
                   <a:srgbClr val="FFFFFF"/>
@@ -2610,6 +2619,7 @@
           <a:lstStyle xmlns:a="http://schemas.openxmlformats.org/drawingml/2006/main"/>
           <a:p xmlns:a="http://schemas.openxmlformats.org/drawingml/2006/main">
             <a:pPr algn="ctr">
+              <a:buNone/>
               <a:defRPr sz="1050" b="1">
                 <a:solidFill>
                   <a:srgbClr val="0A5D43"/>
@@ -2668,6 +2678,7 @@
           <a:lstStyle xmlns:a="http://schemas.openxmlformats.org/drawingml/2006/main"/>
           <a:p xmlns:a="http://schemas.openxmlformats.org/drawingml/2006/main">
             <a:pPr algn="l">
+              <a:buNone/>
               <a:defRPr sz="1350" b="1">
                 <a:solidFill>
                   <a:srgbClr val="102E24"/>
@@ -2755,6 +2766,7 @@
           <a:lstStyle xmlns:a="http://schemas.openxmlformats.org/drawingml/2006/main"/>
           <a:p xmlns:a="http://schemas.openxmlformats.org/drawingml/2006/main">
             <a:pPr algn="l">
+              <a:buNone/>
               <a:defRPr sz="1125" b="1">
                 <a:solidFill>
                   <a:srgbClr val="F2A93B"/>
@@ -2813,6 +2825,7 @@
           <a:lstStyle xmlns:a="http://schemas.openxmlformats.org/drawingml/2006/main"/>
           <a:p xmlns:a="http://schemas.openxmlformats.org/drawingml/2006/main">
             <a:pPr algn="l">
+              <a:buNone/>
               <a:defRPr sz="3450" b="1">
                 <a:solidFill>
                   <a:srgbClr val="FFFFFF"/>
@@ -2836,6 +2849,7 @@
           </a:p>
           <a:p xmlns:a="http://schemas.openxmlformats.org/drawingml/2006/main">
             <a:pPr algn="l">
+              <a:buNone/>
               <a:defRPr sz="3450" b="1">
                 <a:solidFill>
                   <a:srgbClr val="FFFFFF"/>
@@ -2927,6 +2941,7 @@
           <a:lstStyle xmlns:a="http://schemas.openxmlformats.org/drawingml/2006/main"/>
           <a:p xmlns:a="http://schemas.openxmlformats.org/drawingml/2006/main">
             <a:pPr algn="l">
+              <a:buNone/>
               <a:defRPr sz="1200" b="1">
                 <a:solidFill>
                   <a:srgbClr val="F2A93B"/>
@@ -2985,6 +3000,7 @@
           <a:lstStyle xmlns:a="http://schemas.openxmlformats.org/drawingml/2006/main"/>
           <a:p xmlns:a="http://schemas.openxmlformats.org/drawingml/2006/main">
             <a:pPr algn="l">
+              <a:buNone/>
               <a:defRPr sz="1800" b="1">
                 <a:solidFill>
                   <a:srgbClr val="FFFFFF"/>
@@ -3008,6 +3024,7 @@
           </a:p>
           <a:p xmlns:a="http://schemas.openxmlformats.org/drawingml/2006/main">
             <a:pPr algn="l">
+              <a:buNone/>
               <a:defRPr sz="1800" b="1">
                 <a:solidFill>
                   <a:srgbClr val="FFFFFF"/>
@@ -3031,6 +3048,7 @@
           </a:p>
           <a:p xmlns:a="http://schemas.openxmlformats.org/drawingml/2006/main">
             <a:pPr algn="l">
+              <a:buNone/>
               <a:defRPr sz="1800" b="1">
                 <a:solidFill>
                   <a:srgbClr val="FFFFFF"/>
@@ -3089,6 +3107,7 @@
           <a:lstStyle xmlns:a="http://schemas.openxmlformats.org/drawingml/2006/main"/>
           <a:p xmlns:a="http://schemas.openxmlformats.org/drawingml/2006/main">
             <a:pPr algn="l">
+              <a:buNone/>
               <a:defRPr sz="1200" b="1">
                 <a:solidFill>
                   <a:srgbClr val="F2A93B"/>
@@ -3147,6 +3166,7 @@
           <a:lstStyle xmlns:a="http://schemas.openxmlformats.org/drawingml/2006/main"/>
           <a:p xmlns:a="http://schemas.openxmlformats.org/drawingml/2006/main">
             <a:pPr algn="l">
+              <a:buNone/>
               <a:defRPr sz="1800" b="1">
                 <a:solidFill>
                   <a:srgbClr val="FFFFFF"/>
@@ -3170,6 +3190,7 @@
           </a:p>
           <a:p xmlns:a="http://schemas.openxmlformats.org/drawingml/2006/main">
             <a:pPr algn="l">
+              <a:buNone/>
               <a:defRPr sz="1800" b="1">
                 <a:solidFill>
                   <a:srgbClr val="FFFFFF"/>
@@ -3193,6 +3214,7 @@
           </a:p>
           <a:p xmlns:a="http://schemas.openxmlformats.org/drawingml/2006/main">
             <a:pPr algn="l">
+              <a:buNone/>
               <a:defRPr sz="1800" b="1">
                 <a:solidFill>
                   <a:srgbClr val="FFFFFF"/>
@@ -3286,6 +3308,7 @@
           <a:lstStyle xmlns:a="http://schemas.openxmlformats.org/drawingml/2006/main"/>
           <a:p xmlns:a="http://schemas.openxmlformats.org/drawingml/2006/main">
             <a:pPr algn="ctr">
+              <a:buNone/>
               <a:defRPr sz="3450" b="1">
                 <a:solidFill>
                   <a:srgbClr val="0A5D43"/>
@@ -3344,6 +3367,7 @@
           <a:lstStyle xmlns:a="http://schemas.openxmlformats.org/drawingml/2006/main"/>
           <a:p xmlns:a="http://schemas.openxmlformats.org/drawingml/2006/main">
             <a:pPr algn="ctr">
+              <a:buNone/>
               <a:defRPr sz="1350" b="1">
                 <a:solidFill>
                   <a:srgbClr val="60736B"/>
@@ -3402,6 +3426,7 @@
           <a:lstStyle xmlns:a="http://schemas.openxmlformats.org/drawingml/2006/main"/>
           <a:p xmlns:a="http://schemas.openxmlformats.org/drawingml/2006/main">
             <a:pPr algn="l">
+              <a:buNone/>
               <a:defRPr sz="1200" b="0">
                 <a:solidFill>
                   <a:srgbClr val="CFE7DD"/>
@@ -3489,6 +3514,7 @@
           <a:lstStyle xmlns:a="http://schemas.openxmlformats.org/drawingml/2006/main"/>
           <a:p xmlns:a="http://schemas.openxmlformats.org/drawingml/2006/main">
             <a:pPr algn="l">
+              <a:buNone/>
               <a:defRPr sz="1050" b="1">
                 <a:solidFill>
                   <a:srgbClr val="0C9769"/>
@@ -3547,6 +3573,7 @@
           <a:lstStyle xmlns:a="http://schemas.openxmlformats.org/drawingml/2006/main"/>
           <a:p xmlns:a="http://schemas.openxmlformats.org/drawingml/2006/main">
             <a:pPr algn="l">
+              <a:buNone/>
               <a:defRPr sz="3000" b="1">
                 <a:solidFill>
                   <a:srgbClr val="102E24"/>
@@ -3605,6 +3632,7 @@
           <a:lstStyle xmlns:a="http://schemas.openxmlformats.org/drawingml/2006/main"/>
           <a:p xmlns:a="http://schemas.openxmlformats.org/drawingml/2006/main">
             <a:pPr algn="r">
+              <a:buNone/>
               <a:defRPr sz="975" b="0">
                 <a:solidFill>
                   <a:srgbClr val="60736B"/>
@@ -3696,6 +3724,7 @@
           <a:lstStyle xmlns:a="http://schemas.openxmlformats.org/drawingml/2006/main"/>
           <a:p xmlns:a="http://schemas.openxmlformats.org/drawingml/2006/main">
             <a:pPr algn="l">
+              <a:buNone/>
               <a:defRPr sz="1650" b="0">
                 <a:solidFill>
                   <a:srgbClr val="60736B"/>
@@ -3789,6 +3818,7 @@
           <a:lstStyle xmlns:a="http://schemas.openxmlformats.org/drawingml/2006/main"/>
           <a:p xmlns:a="http://schemas.openxmlformats.org/drawingml/2006/main">
             <a:pPr algn="l">
+              <a:buNone/>
               <a:defRPr sz="5250" b="1">
                 <a:solidFill>
                   <a:srgbClr val="102E24"/>
@@ -3847,6 +3877,7 @@
           <a:lstStyle xmlns:a="http://schemas.openxmlformats.org/drawingml/2006/main"/>
           <a:p xmlns:a="http://schemas.openxmlformats.org/drawingml/2006/main">
             <a:pPr algn="l">
+              <a:buNone/>
               <a:defRPr sz="1725" b="1">
                 <a:solidFill>
                   <a:srgbClr val="102E24"/>
@@ -3905,6 +3936,7 @@
           <a:lstStyle xmlns:a="http://schemas.openxmlformats.org/drawingml/2006/main"/>
           <a:p xmlns:a="http://schemas.openxmlformats.org/drawingml/2006/main">
             <a:pPr algn="l">
+              <a:buNone/>
               <a:defRPr sz="1200" b="0">
                 <a:solidFill>
                   <a:srgbClr val="60736B"/>
@@ -3998,6 +4030,7 @@
           <a:lstStyle xmlns:a="http://schemas.openxmlformats.org/drawingml/2006/main"/>
           <a:p xmlns:a="http://schemas.openxmlformats.org/drawingml/2006/main">
             <a:pPr algn="l">
+              <a:buNone/>
               <a:defRPr sz="5250" b="1">
                 <a:solidFill>
                   <a:srgbClr val="FFFFFF"/>
@@ -4056,6 +4089,7 @@
           <a:lstStyle xmlns:a="http://schemas.openxmlformats.org/drawingml/2006/main"/>
           <a:p xmlns:a="http://schemas.openxmlformats.org/drawingml/2006/main">
             <a:pPr algn="l">
+              <a:buNone/>
               <a:defRPr sz="1725" b="1">
                 <a:solidFill>
                   <a:srgbClr val="FFFFFF"/>
@@ -4114,6 +4148,7 @@
           <a:lstStyle xmlns:a="http://schemas.openxmlformats.org/drawingml/2006/main"/>
           <a:p xmlns:a="http://schemas.openxmlformats.org/drawingml/2006/main">
             <a:pPr algn="l">
+              <a:buNone/>
               <a:defRPr sz="1200" b="0">
                 <a:solidFill>
                   <a:srgbClr val="CFE7DD"/>
@@ -4207,6 +4242,7 @@
           <a:lstStyle xmlns:a="http://schemas.openxmlformats.org/drawingml/2006/main"/>
           <a:p xmlns:a="http://schemas.openxmlformats.org/drawingml/2006/main">
             <a:pPr algn="l">
+              <a:buNone/>
               <a:defRPr sz="5250" b="1">
                 <a:solidFill>
                   <a:srgbClr val="102E24"/>
@@ -4265,6 +4301,7 @@
           <a:lstStyle xmlns:a="http://schemas.openxmlformats.org/drawingml/2006/main"/>
           <a:p xmlns:a="http://schemas.openxmlformats.org/drawingml/2006/main">
             <a:pPr algn="l">
+              <a:buNone/>
               <a:defRPr sz="1725" b="1">
                 <a:solidFill>
                   <a:srgbClr val="102E24"/>
@@ -4323,6 +4360,7 @@
           <a:lstStyle xmlns:a="http://schemas.openxmlformats.org/drawingml/2006/main"/>
           <a:p xmlns:a="http://schemas.openxmlformats.org/drawingml/2006/main">
             <a:pPr algn="l">
+              <a:buNone/>
               <a:defRPr sz="1200" b="0">
                 <a:solidFill>
                   <a:srgbClr val="60736B"/>
@@ -4416,6 +4454,7 @@
           <a:lstStyle xmlns:a="http://schemas.openxmlformats.org/drawingml/2006/main"/>
           <a:p xmlns:a="http://schemas.openxmlformats.org/drawingml/2006/main">
             <a:pPr algn="l">
+              <a:buNone/>
               <a:defRPr sz="1200" b="1">
                 <a:solidFill>
                   <a:srgbClr val="0A5D43"/>
@@ -4474,6 +4513,7 @@
           <a:lstStyle xmlns:a="http://schemas.openxmlformats.org/drawingml/2006/main"/>
           <a:p xmlns:a="http://schemas.openxmlformats.org/drawingml/2006/main">
             <a:pPr algn="l">
+              <a:buNone/>
               <a:defRPr sz="1875" b="1">
                 <a:solidFill>
                   <a:srgbClr val="102E24"/>
@@ -4567,6 +4607,7 @@
           <a:lstStyle xmlns:a="http://schemas.openxmlformats.org/drawingml/2006/main"/>
           <a:p xmlns:a="http://schemas.openxmlformats.org/drawingml/2006/main">
             <a:pPr algn="ctr">
+              <a:buNone/>
               <a:defRPr sz="1050" b="1">
                 <a:solidFill>
                   <a:srgbClr val="0A5D43"/>
@@ -4654,6 +4695,7 @@
           <a:lstStyle xmlns:a="http://schemas.openxmlformats.org/drawingml/2006/main"/>
           <a:p xmlns:a="http://schemas.openxmlformats.org/drawingml/2006/main">
             <a:pPr algn="l">
+              <a:buNone/>
               <a:defRPr sz="1050" b="1">
                 <a:solidFill>
                   <a:srgbClr val="0C9769"/>
@@ -4712,6 +4754,7 @@
           <a:lstStyle xmlns:a="http://schemas.openxmlformats.org/drawingml/2006/main"/>
           <a:p xmlns:a="http://schemas.openxmlformats.org/drawingml/2006/main">
             <a:pPr algn="l">
+              <a:buNone/>
               <a:defRPr sz="3000" b="1">
                 <a:solidFill>
                   <a:srgbClr val="102E24"/>
@@ -4770,6 +4813,7 @@
           <a:lstStyle xmlns:a="http://schemas.openxmlformats.org/drawingml/2006/main"/>
           <a:p xmlns:a="http://schemas.openxmlformats.org/drawingml/2006/main">
             <a:pPr algn="r">
+              <a:buNone/>
               <a:defRPr sz="975" b="0">
                 <a:solidFill>
                   <a:srgbClr val="60736B"/>
@@ -4931,6 +4975,7 @@
           <a:lstStyle xmlns:a="http://schemas.openxmlformats.org/drawingml/2006/main"/>
           <a:p xmlns:a="http://schemas.openxmlformats.org/drawingml/2006/main">
             <a:pPr algn="ctr">
+              <a:buNone/>
               <a:defRPr sz="1050" b="1">
                 <a:solidFill>
                   <a:srgbClr val="0C9769"/>
@@ -4989,6 +5034,7 @@
           <a:lstStyle xmlns:a="http://schemas.openxmlformats.org/drawingml/2006/main"/>
           <a:p xmlns:a="http://schemas.openxmlformats.org/drawingml/2006/main">
             <a:pPr algn="l">
+              <a:buNone/>
               <a:defRPr sz="2400" b="1">
                 <a:solidFill>
                   <a:srgbClr val="102E24"/>
@@ -5047,6 +5093,7 @@
           <a:lstStyle xmlns:a="http://schemas.openxmlformats.org/drawingml/2006/main"/>
           <a:p xmlns:a="http://schemas.openxmlformats.org/drawingml/2006/main">
             <a:pPr algn="l">
+              <a:buNone/>
               <a:defRPr sz="1575" b="0">
                 <a:solidFill>
                   <a:srgbClr val="60736B"/>
@@ -5070,6 +5117,7 @@
           </a:p>
           <a:p xmlns:a="http://schemas.openxmlformats.org/drawingml/2006/main">
             <a:pPr algn="l">
+              <a:buNone/>
               <a:defRPr sz="1575" b="0">
                 <a:solidFill>
                   <a:srgbClr val="60736B"/>
@@ -5161,6 +5209,7 @@
           <a:lstStyle xmlns:a="http://schemas.openxmlformats.org/drawingml/2006/main"/>
           <a:p xmlns:a="http://schemas.openxmlformats.org/drawingml/2006/main">
             <a:pPr algn="l">
+              <a:buNone/>
               <a:defRPr sz="1200" b="1">
                 <a:solidFill>
                   <a:srgbClr val="0C9769"/>
@@ -5289,6 +5338,7 @@
           <a:lstStyle xmlns:a="http://schemas.openxmlformats.org/drawingml/2006/main"/>
           <a:p xmlns:a="http://schemas.openxmlformats.org/drawingml/2006/main">
             <a:pPr algn="ctr">
+              <a:buNone/>
               <a:defRPr sz="1050" b="1">
                 <a:solidFill>
                   <a:srgbClr val="F2A93B"/>
@@ -5347,6 +5397,7 @@
           <a:lstStyle xmlns:a="http://schemas.openxmlformats.org/drawingml/2006/main"/>
           <a:p xmlns:a="http://schemas.openxmlformats.org/drawingml/2006/main">
             <a:pPr algn="l">
+              <a:buNone/>
               <a:defRPr sz="2400" b="1">
                 <a:solidFill>
                   <a:srgbClr val="102E24"/>
@@ -5405,6 +5456,7 @@
           <a:lstStyle xmlns:a="http://schemas.openxmlformats.org/drawingml/2006/main"/>
           <a:p xmlns:a="http://schemas.openxmlformats.org/drawingml/2006/main">
             <a:pPr algn="l">
+              <a:buNone/>
               <a:defRPr sz="1575" b="0">
                 <a:solidFill>
                   <a:srgbClr val="60736B"/>
@@ -5428,6 +5480,7 @@
           </a:p>
           <a:p xmlns:a="http://schemas.openxmlformats.org/drawingml/2006/main">
             <a:pPr algn="l">
+              <a:buNone/>
               <a:defRPr sz="1575" b="0">
                 <a:solidFill>
                   <a:srgbClr val="60736B"/>
@@ -5519,6 +5572,7 @@
           <a:lstStyle xmlns:a="http://schemas.openxmlformats.org/drawingml/2006/main"/>
           <a:p xmlns:a="http://schemas.openxmlformats.org/drawingml/2006/main">
             <a:pPr algn="l">
+              <a:buNone/>
               <a:defRPr sz="1200" b="1">
                 <a:solidFill>
                   <a:srgbClr val="F2A93B"/>
@@ -5647,6 +5701,7 @@
           <a:lstStyle xmlns:a="http://schemas.openxmlformats.org/drawingml/2006/main"/>
           <a:p xmlns:a="http://schemas.openxmlformats.org/drawingml/2006/main">
             <a:pPr algn="ctr">
+              <a:buNone/>
               <a:defRPr sz="1050" b="1">
                 <a:solidFill>
                   <a:srgbClr val="4AA3A1"/>
@@ -5705,6 +5760,7 @@
           <a:lstStyle xmlns:a="http://schemas.openxmlformats.org/drawingml/2006/main"/>
           <a:p xmlns:a="http://schemas.openxmlformats.org/drawingml/2006/main">
             <a:pPr algn="l">
+              <a:buNone/>
               <a:defRPr sz="2400" b="1">
                 <a:solidFill>
                   <a:srgbClr val="102E24"/>
@@ -5763,6 +5819,7 @@
           <a:lstStyle xmlns:a="http://schemas.openxmlformats.org/drawingml/2006/main"/>
           <a:p xmlns:a="http://schemas.openxmlformats.org/drawingml/2006/main">
             <a:pPr algn="l">
+              <a:buNone/>
               <a:defRPr sz="1575" b="0">
                 <a:solidFill>
                   <a:srgbClr val="60736B"/>
@@ -5786,6 +5843,7 @@
           </a:p>
           <a:p xmlns:a="http://schemas.openxmlformats.org/drawingml/2006/main">
             <a:pPr algn="l">
+              <a:buNone/>
               <a:defRPr sz="1575" b="0">
                 <a:solidFill>
                   <a:srgbClr val="60736B"/>
@@ -5877,6 +5935,7 @@
           <a:lstStyle xmlns:a="http://schemas.openxmlformats.org/drawingml/2006/main"/>
           <a:p xmlns:a="http://schemas.openxmlformats.org/drawingml/2006/main">
             <a:pPr algn="l">
+              <a:buNone/>
               <a:defRPr sz="1200" b="1">
                 <a:solidFill>
                   <a:srgbClr val="4AA3A1"/>
@@ -5935,6 +5994,7 @@
           <a:lstStyle xmlns:a="http://schemas.openxmlformats.org/drawingml/2006/main"/>
           <a:p xmlns:a="http://schemas.openxmlformats.org/drawingml/2006/main">
             <a:pPr algn="ctr">
+              <a:buNone/>
               <a:defRPr sz="2550" b="1">
                 <a:solidFill>
                   <a:srgbClr val="0C9769"/>
@@ -5993,6 +6053,7 @@
           <a:lstStyle xmlns:a="http://schemas.openxmlformats.org/drawingml/2006/main"/>
           <a:p xmlns:a="http://schemas.openxmlformats.org/drawingml/2006/main">
             <a:pPr algn="ctr">
+              <a:buNone/>
               <a:defRPr sz="2550" b="1">
                 <a:solidFill>
                   <a:srgbClr val="0C9769"/>
@@ -6086,6 +6147,7 @@
           <a:lstStyle xmlns:a="http://schemas.openxmlformats.org/drawingml/2006/main"/>
           <a:p xmlns:a="http://schemas.openxmlformats.org/drawingml/2006/main">
             <a:pPr algn="ctr">
+              <a:buNone/>
               <a:defRPr sz="1350" b="1">
                 <a:solidFill>
                   <a:srgbClr val="FFFFFF"/>
@@ -6173,6 +6235,7 @@
           <a:lstStyle xmlns:a="http://schemas.openxmlformats.org/drawingml/2006/main"/>
           <a:p xmlns:a="http://schemas.openxmlformats.org/drawingml/2006/main">
             <a:pPr algn="l">
+              <a:buNone/>
               <a:defRPr sz="1050" b="1">
                 <a:solidFill>
                   <a:srgbClr val="0C9769"/>
@@ -6231,6 +6294,7 @@
           <a:lstStyle xmlns:a="http://schemas.openxmlformats.org/drawingml/2006/main"/>
           <a:p xmlns:a="http://schemas.openxmlformats.org/drawingml/2006/main">
             <a:pPr algn="l">
+              <a:buNone/>
               <a:defRPr sz="3000" b="1">
                 <a:solidFill>
                   <a:srgbClr val="102E24"/>
@@ -6289,6 +6353,7 @@
           <a:lstStyle xmlns:a="http://schemas.openxmlformats.org/drawingml/2006/main"/>
           <a:p xmlns:a="http://schemas.openxmlformats.org/drawingml/2006/main">
             <a:pPr algn="r">
+              <a:buNone/>
               <a:defRPr sz="975" b="0">
                 <a:solidFill>
                   <a:srgbClr val="60736B"/>
@@ -6415,6 +6480,7 @@
           <a:lstStyle xmlns:a="http://schemas.openxmlformats.org/drawingml/2006/main"/>
           <a:p xmlns:a="http://schemas.openxmlformats.org/drawingml/2006/main">
             <a:pPr algn="l">
+              <a:buNone/>
               <a:defRPr sz="2100" b="1">
                 <a:solidFill>
                   <a:srgbClr val="0C9769"/>
@@ -6473,6 +6539,7 @@
           <a:lstStyle xmlns:a="http://schemas.openxmlformats.org/drawingml/2006/main"/>
           <a:p xmlns:a="http://schemas.openxmlformats.org/drawingml/2006/main">
             <a:pPr algn="l">
+              <a:buNone/>
               <a:defRPr sz="1875" b="1">
                 <a:solidFill>
                   <a:srgbClr val="102E24"/>
@@ -6531,6 +6598,7 @@
           <a:lstStyle xmlns:a="http://schemas.openxmlformats.org/drawingml/2006/main"/>
           <a:p xmlns:a="http://schemas.openxmlformats.org/drawingml/2006/main">
             <a:pPr algn="l">
+              <a:buNone/>
               <a:defRPr sz="1350" b="0">
                 <a:solidFill>
                   <a:srgbClr val="60736B"/>
@@ -6554,6 +6622,7 @@
           </a:p>
           <a:p xmlns:a="http://schemas.openxmlformats.org/drawingml/2006/main">
             <a:pPr algn="l">
+              <a:buNone/>
               <a:defRPr sz="1350" b="0">
                 <a:solidFill>
                   <a:srgbClr val="60736B"/>
@@ -6647,6 +6716,7 @@
           <a:lstStyle xmlns:a="http://schemas.openxmlformats.org/drawingml/2006/main"/>
           <a:p xmlns:a="http://schemas.openxmlformats.org/drawingml/2006/main">
             <a:pPr algn="ctr">
+              <a:buNone/>
               <a:defRPr sz="1050" b="1">
                 <a:solidFill>
                   <a:srgbClr val="0A5D43"/>
@@ -6740,6 +6810,7 @@
           <a:lstStyle xmlns:a="http://schemas.openxmlformats.org/drawingml/2006/main"/>
           <a:p xmlns:a="http://schemas.openxmlformats.org/drawingml/2006/main">
             <a:pPr algn="l">
+              <a:buNone/>
               <a:defRPr sz="2100" b="1">
                 <a:solidFill>
                   <a:srgbClr val="0C9769"/>
@@ -6798,6 +6869,7 @@
           <a:lstStyle xmlns:a="http://schemas.openxmlformats.org/drawingml/2006/main"/>
           <a:p xmlns:a="http://schemas.openxmlformats.org/drawingml/2006/main">
             <a:pPr algn="l">
+              <a:buNone/>
               <a:defRPr sz="1875" b="1">
                 <a:solidFill>
                   <a:srgbClr val="102E24"/>
@@ -6856,6 +6928,7 @@
           <a:lstStyle xmlns:a="http://schemas.openxmlformats.org/drawingml/2006/main"/>
           <a:p xmlns:a="http://schemas.openxmlformats.org/drawingml/2006/main">
             <a:pPr algn="l">
+              <a:buNone/>
               <a:defRPr sz="1350" b="0">
                 <a:solidFill>
                   <a:srgbClr val="60736B"/>
@@ -6879,6 +6952,7 @@
           </a:p>
           <a:p xmlns:a="http://schemas.openxmlformats.org/drawingml/2006/main">
             <a:pPr algn="l">
+              <a:buNone/>
               <a:defRPr sz="1350" b="0">
                 <a:solidFill>
                   <a:srgbClr val="60736B"/>
@@ -6972,6 +7046,7 @@
           <a:lstStyle xmlns:a="http://schemas.openxmlformats.org/drawingml/2006/main"/>
           <a:p xmlns:a="http://schemas.openxmlformats.org/drawingml/2006/main">
             <a:pPr algn="ctr">
+              <a:buNone/>
               <a:defRPr sz="1050" b="1">
                 <a:solidFill>
                   <a:srgbClr val="0A5D43"/>
@@ -7065,6 +7140,7 @@
           <a:lstStyle xmlns:a="http://schemas.openxmlformats.org/drawingml/2006/main"/>
           <a:p xmlns:a="http://schemas.openxmlformats.org/drawingml/2006/main">
             <a:pPr algn="l">
+              <a:buNone/>
               <a:defRPr sz="2100" b="1">
                 <a:solidFill>
                   <a:srgbClr val="F2A93B"/>
@@ -7123,6 +7199,7 @@
           <a:lstStyle xmlns:a="http://schemas.openxmlformats.org/drawingml/2006/main"/>
           <a:p xmlns:a="http://schemas.openxmlformats.org/drawingml/2006/main">
             <a:pPr algn="l">
+              <a:buNone/>
               <a:defRPr sz="1875" b="1">
                 <a:solidFill>
                   <a:srgbClr val="102E24"/>
@@ -7181,6 +7258,7 @@
           <a:lstStyle xmlns:a="http://schemas.openxmlformats.org/drawingml/2006/main"/>
           <a:p xmlns:a="http://schemas.openxmlformats.org/drawingml/2006/main">
             <a:pPr algn="l">
+              <a:buNone/>
               <a:defRPr sz="1350" b="0">
                 <a:solidFill>
                   <a:srgbClr val="60736B"/>
@@ -7204,6 +7282,7 @@
           </a:p>
           <a:p xmlns:a="http://schemas.openxmlformats.org/drawingml/2006/main">
             <a:pPr algn="l">
+              <a:buNone/>
               <a:defRPr sz="1350" b="0">
                 <a:solidFill>
                   <a:srgbClr val="60736B"/>
@@ -7297,6 +7376,7 @@
           <a:lstStyle xmlns:a="http://schemas.openxmlformats.org/drawingml/2006/main"/>
           <a:p xmlns:a="http://schemas.openxmlformats.org/drawingml/2006/main">
             <a:pPr algn="ctr">
+              <a:buNone/>
               <a:defRPr sz="1050" b="1">
                 <a:solidFill>
                   <a:srgbClr val="0A5D43"/>
@@ -7390,6 +7470,7 @@
           <a:lstStyle xmlns:a="http://schemas.openxmlformats.org/drawingml/2006/main"/>
           <a:p xmlns:a="http://schemas.openxmlformats.org/drawingml/2006/main">
             <a:pPr algn="l">
+              <a:buNone/>
               <a:defRPr sz="2100" b="1">
                 <a:solidFill>
                   <a:srgbClr val="0C9769"/>
@@ -7448,6 +7529,7 @@
           <a:lstStyle xmlns:a="http://schemas.openxmlformats.org/drawingml/2006/main"/>
           <a:p xmlns:a="http://schemas.openxmlformats.org/drawingml/2006/main">
             <a:pPr algn="l">
+              <a:buNone/>
               <a:defRPr sz="1875" b="1">
                 <a:solidFill>
                   <a:srgbClr val="102E24"/>
@@ -7506,6 +7588,7 @@
           <a:lstStyle xmlns:a="http://schemas.openxmlformats.org/drawingml/2006/main"/>
           <a:p xmlns:a="http://schemas.openxmlformats.org/drawingml/2006/main">
             <a:pPr algn="l">
+              <a:buNone/>
               <a:defRPr sz="1350" b="0">
                 <a:solidFill>
                   <a:srgbClr val="60736B"/>
@@ -7529,6 +7612,7 @@
           </a:p>
           <a:p xmlns:a="http://schemas.openxmlformats.org/drawingml/2006/main">
             <a:pPr algn="l">
+              <a:buNone/>
               <a:defRPr sz="1350" b="0">
                 <a:solidFill>
                   <a:srgbClr val="60736B"/>
@@ -7622,6 +7706,7 @@
           <a:lstStyle xmlns:a="http://schemas.openxmlformats.org/drawingml/2006/main"/>
           <a:p xmlns:a="http://schemas.openxmlformats.org/drawingml/2006/main">
             <a:pPr algn="ctr">
+              <a:buNone/>
               <a:defRPr sz="1050" b="1">
                 <a:solidFill>
                   <a:srgbClr val="0A5D43"/>
@@ -7715,6 +7800,7 @@
           <a:lstStyle xmlns:a="http://schemas.openxmlformats.org/drawingml/2006/main"/>
           <a:p xmlns:a="http://schemas.openxmlformats.org/drawingml/2006/main">
             <a:pPr algn="l">
+              <a:buNone/>
               <a:defRPr sz="1125" b="1">
                 <a:solidFill>
                   <a:srgbClr val="F2A93B"/>
@@ -7773,6 +7859,7 @@
           <a:lstStyle xmlns:a="http://schemas.openxmlformats.org/drawingml/2006/main"/>
           <a:p xmlns:a="http://schemas.openxmlformats.org/drawingml/2006/main">
             <a:pPr algn="l">
+              <a:buNone/>
               <a:defRPr sz="1575" b="1">
                 <a:solidFill>
                   <a:srgbClr val="FFFFFF"/>
@@ -7866,6 +7953,7 @@
           <a:lstStyle xmlns:a="http://schemas.openxmlformats.org/drawingml/2006/main"/>
           <a:p xmlns:a="http://schemas.openxmlformats.org/drawingml/2006/main">
             <a:pPr algn="l">
+              <a:buNone/>
               <a:defRPr sz="1125" b="1">
                 <a:solidFill>
                   <a:srgbClr val="A86200"/>
@@ -7924,6 +8012,7 @@
           <a:lstStyle xmlns:a="http://schemas.openxmlformats.org/drawingml/2006/main"/>
           <a:p xmlns:a="http://schemas.openxmlformats.org/drawingml/2006/main">
             <a:pPr algn="l">
+              <a:buNone/>
               <a:defRPr sz="1575" b="1">
                 <a:solidFill>
                   <a:srgbClr val="102E24"/>
@@ -8011,6 +8100,7 @@
           <a:lstStyle xmlns:a="http://schemas.openxmlformats.org/drawingml/2006/main"/>
           <a:p xmlns:a="http://schemas.openxmlformats.org/drawingml/2006/main">
             <a:pPr algn="l">
+              <a:buNone/>
               <a:defRPr sz="1050" b="1">
                 <a:solidFill>
                   <a:srgbClr val="0C9769"/>
@@ -8069,6 +8159,7 @@
           <a:lstStyle xmlns:a="http://schemas.openxmlformats.org/drawingml/2006/main"/>
           <a:p xmlns:a="http://schemas.openxmlformats.org/drawingml/2006/main">
             <a:pPr algn="l">
+              <a:buNone/>
               <a:defRPr sz="3000" b="1">
                 <a:solidFill>
                   <a:srgbClr val="102E24"/>
@@ -8127,6 +8218,7 @@
           <a:lstStyle xmlns:a="http://schemas.openxmlformats.org/drawingml/2006/main"/>
           <a:p xmlns:a="http://schemas.openxmlformats.org/drawingml/2006/main">
             <a:pPr algn="r">
+              <a:buNone/>
               <a:defRPr sz="975" b="0">
                 <a:solidFill>
                   <a:srgbClr val="60736B"/>
@@ -8288,6 +8380,7 @@
           <a:lstStyle xmlns:a="http://schemas.openxmlformats.org/drawingml/2006/main"/>
           <a:p xmlns:a="http://schemas.openxmlformats.org/drawingml/2006/main">
             <a:pPr algn="ctr">
+              <a:buNone/>
               <a:defRPr sz="1650" b="1">
                 <a:solidFill>
                   <a:srgbClr val="0A5D43"/>
@@ -8346,6 +8439,7 @@
           <a:lstStyle xmlns:a="http://schemas.openxmlformats.org/drawingml/2006/main"/>
           <a:p xmlns:a="http://schemas.openxmlformats.org/drawingml/2006/main">
             <a:pPr algn="l">
+              <a:buNone/>
               <a:defRPr sz="1500" b="1">
                 <a:solidFill>
                   <a:srgbClr val="102E24"/>
@@ -8474,6 +8568,7 @@
           <a:lstStyle xmlns:a="http://schemas.openxmlformats.org/drawingml/2006/main"/>
           <a:p xmlns:a="http://schemas.openxmlformats.org/drawingml/2006/main">
             <a:pPr algn="ctr">
+              <a:buNone/>
               <a:defRPr sz="1650" b="1">
                 <a:solidFill>
                   <a:srgbClr val="0A5D43"/>
@@ -8532,6 +8627,7 @@
           <a:lstStyle xmlns:a="http://schemas.openxmlformats.org/drawingml/2006/main"/>
           <a:p xmlns:a="http://schemas.openxmlformats.org/drawingml/2006/main">
             <a:pPr algn="l">
+              <a:buNone/>
               <a:defRPr sz="1500" b="1">
                 <a:solidFill>
                   <a:srgbClr val="102E24"/>
@@ -8660,6 +8756,7 @@
           <a:lstStyle xmlns:a="http://schemas.openxmlformats.org/drawingml/2006/main"/>
           <a:p xmlns:a="http://schemas.openxmlformats.org/drawingml/2006/main">
             <a:pPr algn="ctr">
+              <a:buNone/>
               <a:defRPr sz="1650" b="1">
                 <a:solidFill>
                   <a:srgbClr val="0A5D43"/>
@@ -8718,6 +8815,7 @@
           <a:lstStyle xmlns:a="http://schemas.openxmlformats.org/drawingml/2006/main"/>
           <a:p xmlns:a="http://schemas.openxmlformats.org/drawingml/2006/main">
             <a:pPr algn="l">
+              <a:buNone/>
               <a:defRPr sz="1500" b="1">
                 <a:solidFill>
                   <a:srgbClr val="102E24"/>
@@ -8846,6 +8944,7 @@
           <a:lstStyle xmlns:a="http://schemas.openxmlformats.org/drawingml/2006/main"/>
           <a:p xmlns:a="http://schemas.openxmlformats.org/drawingml/2006/main">
             <a:pPr algn="ctr">
+              <a:buNone/>
               <a:defRPr sz="1650" b="1">
                 <a:solidFill>
                   <a:srgbClr val="0A5D43"/>
@@ -8904,6 +9003,7 @@
           <a:lstStyle xmlns:a="http://schemas.openxmlformats.org/drawingml/2006/main"/>
           <a:p xmlns:a="http://schemas.openxmlformats.org/drawingml/2006/main">
             <a:pPr algn="l">
+              <a:buNone/>
               <a:defRPr sz="1500" b="1">
                 <a:solidFill>
                   <a:srgbClr val="102E24"/>
@@ -9032,6 +9132,7 @@
           <a:lstStyle xmlns:a="http://schemas.openxmlformats.org/drawingml/2006/main"/>
           <a:p xmlns:a="http://schemas.openxmlformats.org/drawingml/2006/main">
             <a:pPr algn="ctr">
+              <a:buNone/>
               <a:defRPr sz="1650" b="1">
                 <a:solidFill>
                   <a:srgbClr val="0A5D43"/>
@@ -9090,6 +9191,7 @@
           <a:lstStyle xmlns:a="http://schemas.openxmlformats.org/drawingml/2006/main"/>
           <a:p xmlns:a="http://schemas.openxmlformats.org/drawingml/2006/main">
             <a:pPr algn="l">
+              <a:buNone/>
               <a:defRPr sz="1500" b="1">
                 <a:solidFill>
                   <a:srgbClr val="102E24"/>
@@ -9218,6 +9320,7 @@
           <a:lstStyle xmlns:a="http://schemas.openxmlformats.org/drawingml/2006/main"/>
           <a:p xmlns:a="http://schemas.openxmlformats.org/drawingml/2006/main">
             <a:pPr algn="ctr">
+              <a:buNone/>
               <a:defRPr sz="1650" b="1">
                 <a:solidFill>
                   <a:srgbClr val="A86200"/>
@@ -9276,6 +9379,7 @@
           <a:lstStyle xmlns:a="http://schemas.openxmlformats.org/drawingml/2006/main"/>
           <a:p xmlns:a="http://schemas.openxmlformats.org/drawingml/2006/main">
             <a:pPr algn="l">
+              <a:buNone/>
               <a:defRPr sz="1500" b="1">
                 <a:solidFill>
                   <a:srgbClr val="102E24"/>
@@ -9404,6 +9508,7 @@
           <a:lstStyle xmlns:a="http://schemas.openxmlformats.org/drawingml/2006/main"/>
           <a:p xmlns:a="http://schemas.openxmlformats.org/drawingml/2006/main">
             <a:pPr algn="ctr">
+              <a:buNone/>
               <a:defRPr sz="1650" b="1">
                 <a:solidFill>
                   <a:srgbClr val="A86200"/>
@@ -9462,6 +9567,7 @@
           <a:lstStyle xmlns:a="http://schemas.openxmlformats.org/drawingml/2006/main"/>
           <a:p xmlns:a="http://schemas.openxmlformats.org/drawingml/2006/main">
             <a:pPr algn="l">
+              <a:buNone/>
               <a:defRPr sz="1500" b="1">
                 <a:solidFill>
                   <a:srgbClr val="102E24"/>
@@ -9590,6 +9696,7 @@
           <a:lstStyle xmlns:a="http://schemas.openxmlformats.org/drawingml/2006/main"/>
           <a:p xmlns:a="http://schemas.openxmlformats.org/drawingml/2006/main">
             <a:pPr algn="ctr">
+              <a:buNone/>
               <a:defRPr sz="1650" b="1">
                 <a:solidFill>
                   <a:srgbClr val="A86200"/>
@@ -9648,6 +9755,7 @@
           <a:lstStyle xmlns:a="http://schemas.openxmlformats.org/drawingml/2006/main"/>
           <a:p xmlns:a="http://schemas.openxmlformats.org/drawingml/2006/main">
             <a:pPr algn="l">
+              <a:buNone/>
               <a:defRPr sz="1500" b="1">
                 <a:solidFill>
                   <a:srgbClr val="102E24"/>
@@ -9741,6 +9849,7 @@
           <a:lstStyle xmlns:a="http://schemas.openxmlformats.org/drawingml/2006/main"/>
           <a:p xmlns:a="http://schemas.openxmlformats.org/drawingml/2006/main">
             <a:pPr algn="l">
+              <a:buNone/>
               <a:defRPr sz="1125" b="1">
                 <a:solidFill>
                   <a:srgbClr val="F2A93B"/>
@@ -9799,6 +9908,7 @@
           <a:lstStyle xmlns:a="http://schemas.openxmlformats.org/drawingml/2006/main"/>
           <a:p xmlns:a="http://schemas.openxmlformats.org/drawingml/2006/main">
             <a:pPr algn="l">
+              <a:buNone/>
               <a:defRPr sz="1575" b="1">
                 <a:solidFill>
                   <a:srgbClr val="FFFFFF"/>
@@ -9857,6 +9967,7 @@
           <a:lstStyle xmlns:a="http://schemas.openxmlformats.org/drawingml/2006/main"/>
           <a:p xmlns:a="http://schemas.openxmlformats.org/drawingml/2006/main">
             <a:pPr algn="l">
+              <a:buNone/>
               <a:defRPr sz="1125" b="1">
                 <a:solidFill>
                   <a:srgbClr val="F2A93B"/>
@@ -9915,6 +10026,7 @@
           <a:lstStyle xmlns:a="http://schemas.openxmlformats.org/drawingml/2006/main"/>
           <a:p xmlns:a="http://schemas.openxmlformats.org/drawingml/2006/main">
             <a:pPr algn="l">
+              <a:buNone/>
               <a:defRPr sz="1575" b="1">
                 <a:solidFill>
                   <a:srgbClr val="FFFFFF"/>
@@ -9973,6 +10085,7 @@
           <a:lstStyle xmlns:a="http://schemas.openxmlformats.org/drawingml/2006/main"/>
           <a:p xmlns:a="http://schemas.openxmlformats.org/drawingml/2006/main">
             <a:pPr algn="l">
+              <a:buNone/>
               <a:defRPr sz="1125" b="1">
                 <a:solidFill>
                   <a:srgbClr val="F2A93B"/>
@@ -10031,6 +10144,7 @@
           <a:lstStyle xmlns:a="http://schemas.openxmlformats.org/drawingml/2006/main"/>
           <a:p xmlns:a="http://schemas.openxmlformats.org/drawingml/2006/main">
             <a:pPr algn="l">
+              <a:buNone/>
               <a:defRPr sz="1575" b="1">
                 <a:solidFill>
                   <a:srgbClr val="FFFFFF"/>
@@ -10089,6 +10203,7 @@
           <a:lstStyle xmlns:a="http://schemas.openxmlformats.org/drawingml/2006/main"/>
           <a:p xmlns:a="http://schemas.openxmlformats.org/drawingml/2006/main">
             <a:pPr algn="l">
+              <a:buNone/>
               <a:defRPr sz="1125" b="1">
                 <a:solidFill>
                   <a:srgbClr val="F2A93B"/>
@@ -10147,6 +10262,7 @@
           <a:lstStyle xmlns:a="http://schemas.openxmlformats.org/drawingml/2006/main"/>
           <a:p xmlns:a="http://schemas.openxmlformats.org/drawingml/2006/main">
             <a:pPr algn="l">
+              <a:buNone/>
               <a:defRPr sz="1575" b="1">
                 <a:solidFill>
                   <a:srgbClr val="FFFFFF"/>
@@ -10205,6 +10321,7 @@
           <a:lstStyle xmlns:a="http://schemas.openxmlformats.org/drawingml/2006/main"/>
           <a:p xmlns:a="http://schemas.openxmlformats.org/drawingml/2006/main">
             <a:pPr algn="l">
+              <a:buNone/>
               <a:defRPr sz="1275" b="0">
                 <a:solidFill>
                   <a:srgbClr val="CFE7DD"/>
@@ -10292,6 +10409,7 @@
           <a:lstStyle xmlns:a="http://schemas.openxmlformats.org/drawingml/2006/main"/>
           <a:p xmlns:a="http://schemas.openxmlformats.org/drawingml/2006/main">
             <a:pPr algn="l">
+              <a:buNone/>
               <a:defRPr sz="1050" b="1">
                 <a:solidFill>
                   <a:srgbClr val="0C9769"/>
@@ -10350,6 +10468,7 @@
           <a:lstStyle xmlns:a="http://schemas.openxmlformats.org/drawingml/2006/main"/>
           <a:p xmlns:a="http://schemas.openxmlformats.org/drawingml/2006/main">
             <a:pPr algn="l">
+              <a:buNone/>
               <a:defRPr sz="3000" b="1">
                 <a:solidFill>
                   <a:srgbClr val="102E24"/>
@@ -10408,6 +10527,7 @@
           <a:lstStyle xmlns:a="http://schemas.openxmlformats.org/drawingml/2006/main"/>
           <a:p xmlns:a="http://schemas.openxmlformats.org/drawingml/2006/main">
             <a:pPr algn="r">
+              <a:buNone/>
               <a:defRPr sz="975" b="0">
                 <a:solidFill>
                   <a:srgbClr val="60736B"/>
@@ -10466,26 +10586,20 @@
       </p:sp>
       <p:pic>
         <p:nvPicPr>
-          <p:cNvPr id="11" name=""/>
+          <p:cNvPr id="13" name=""/>
           <p:cNvPicPr>
             <a:picLocks xmlns:a="http://schemas.openxmlformats.org/drawingml/2006/main" noChangeAspect="1"/>
           </p:cNvPicPr>
           <p:nvPr/>
         </p:nvPicPr>
         <p:blipFill>
-          <a:blip xmlns:r="http://schemas.openxmlformats.org/officeDocument/2006/relationships" xmlns:a="http://schemas.openxmlformats.org/drawingml/2006/main" r:embed="R976e3f6fc11641ed">
-            <a:extLst>
-              <a:ext uri="{96DAC541-7B7A-43D3-8B79-37D633B846F1}">
-                <asvg:svgBlip xmlns:asvg="http://schemas.microsoft.com/office/drawing/2016/SVG/main" r:embed="Rcaff16c0f99340db"/>
-              </a:ext>
-            </a:extLst>
-          </a:blip>
+          <a:blip xmlns:r="http://schemas.openxmlformats.org/officeDocument/2006/relationships" xmlns:a="http://schemas.openxmlformats.org/drawingml/2006/main" r:embed="R361ce9cae2564c4a"/>
           <a:stretch xmlns:a="http://schemas.openxmlformats.org/drawingml/2006/main"/>
         </p:blipFill>
         <p:spPr>
           <a:xfrm xmlns:a="http://schemas.openxmlformats.org/drawingml/2006/main">
-            <a:off x="381000" y="1333500"/>
-            <a:ext cx="11430000" cy="4895850"/>
+            <a:off x="1744133" y="1333500"/>
+            <a:ext cx="8703733" cy="4895850"/>
           </a:xfrm>
           <a:prstGeom xmlns:a="http://schemas.openxmlformats.org/drawingml/2006/main" prst="rect">
             <a:avLst/>
@@ -10527,6 +10641,7 @@
           <a:lstStyle xmlns:a="http://schemas.openxmlformats.org/drawingml/2006/main"/>
           <a:p xmlns:a="http://schemas.openxmlformats.org/drawingml/2006/main">
             <a:pPr algn="l">
+              <a:buNone/>
               <a:defRPr sz="975" b="0">
                 <a:solidFill>
                   <a:srgbClr val="60736B"/>
@@ -10614,6 +10729,7 @@
           <a:lstStyle xmlns:a="http://schemas.openxmlformats.org/drawingml/2006/main"/>
           <a:p xmlns:a="http://schemas.openxmlformats.org/drawingml/2006/main">
             <a:pPr algn="l">
+              <a:buNone/>
               <a:defRPr sz="1050" b="1">
                 <a:solidFill>
                   <a:srgbClr val="0C9769"/>
@@ -10672,6 +10788,7 @@
           <a:lstStyle xmlns:a="http://schemas.openxmlformats.org/drawingml/2006/main"/>
           <a:p xmlns:a="http://schemas.openxmlformats.org/drawingml/2006/main">
             <a:pPr algn="l">
+              <a:buNone/>
               <a:defRPr sz="3000" b="1">
                 <a:solidFill>
                   <a:srgbClr val="102E24"/>
@@ -10730,6 +10847,7 @@
           <a:lstStyle xmlns:a="http://schemas.openxmlformats.org/drawingml/2006/main"/>
           <a:p xmlns:a="http://schemas.openxmlformats.org/drawingml/2006/main">
             <a:pPr algn="r">
+              <a:buNone/>
               <a:defRPr sz="975" b="0">
                 <a:solidFill>
                   <a:srgbClr val="60736B"/>
@@ -10856,6 +10974,7 @@
           <a:lstStyle xmlns:a="http://schemas.openxmlformats.org/drawingml/2006/main"/>
           <a:p xmlns:a="http://schemas.openxmlformats.org/drawingml/2006/main">
             <a:pPr algn="l">
+              <a:buNone/>
               <a:defRPr sz="1050" b="1">
                 <a:solidFill>
                   <a:srgbClr val="0C9769"/>
@@ -10914,6 +11033,7 @@
           <a:lstStyle xmlns:a="http://schemas.openxmlformats.org/drawingml/2006/main"/>
           <a:p xmlns:a="http://schemas.openxmlformats.org/drawingml/2006/main">
             <a:pPr algn="l">
+              <a:buNone/>
               <a:defRPr sz="1650" b="1">
                 <a:solidFill>
                   <a:srgbClr val="102E24"/>
@@ -10972,6 +11092,7 @@
           <a:lstStyle xmlns:a="http://schemas.openxmlformats.org/drawingml/2006/main"/>
           <a:p xmlns:a="http://schemas.openxmlformats.org/drawingml/2006/main">
             <a:pPr algn="l">
+              <a:buNone/>
               <a:defRPr sz="1125" b="0">
                 <a:solidFill>
                   <a:srgbClr val="60736B"/>
@@ -11065,6 +11186,7 @@
           <a:lstStyle xmlns:a="http://schemas.openxmlformats.org/drawingml/2006/main"/>
           <a:p xmlns:a="http://schemas.openxmlformats.org/drawingml/2006/main">
             <a:pPr algn="l">
+              <a:buNone/>
               <a:defRPr sz="1050" b="1">
                 <a:solidFill>
                   <a:srgbClr val="0C9769"/>
@@ -11123,6 +11245,7 @@
           <a:lstStyle xmlns:a="http://schemas.openxmlformats.org/drawingml/2006/main"/>
           <a:p xmlns:a="http://schemas.openxmlformats.org/drawingml/2006/main">
             <a:pPr algn="l">
+              <a:buNone/>
               <a:defRPr sz="1650" b="1">
                 <a:solidFill>
                   <a:srgbClr val="102E24"/>
@@ -11181,6 +11304,7 @@
           <a:lstStyle xmlns:a="http://schemas.openxmlformats.org/drawingml/2006/main"/>
           <a:p xmlns:a="http://schemas.openxmlformats.org/drawingml/2006/main">
             <a:pPr algn="l">
+              <a:buNone/>
               <a:defRPr sz="1125" b="0">
                 <a:solidFill>
                   <a:srgbClr val="60736B"/>
@@ -11274,6 +11398,7 @@
           <a:lstStyle xmlns:a="http://schemas.openxmlformats.org/drawingml/2006/main"/>
           <a:p xmlns:a="http://schemas.openxmlformats.org/drawingml/2006/main">
             <a:pPr algn="l">
+              <a:buNone/>
               <a:defRPr sz="1050" b="1">
                 <a:solidFill>
                   <a:srgbClr val="0C9769"/>
@@ -11332,6 +11457,7 @@
           <a:lstStyle xmlns:a="http://schemas.openxmlformats.org/drawingml/2006/main"/>
           <a:p xmlns:a="http://schemas.openxmlformats.org/drawingml/2006/main">
             <a:pPr algn="l">
+              <a:buNone/>
               <a:defRPr sz="1650" b="1">
                 <a:solidFill>
                   <a:srgbClr val="102E24"/>
@@ -11390,6 +11516,7 @@
           <a:lstStyle xmlns:a="http://schemas.openxmlformats.org/drawingml/2006/main"/>
           <a:p xmlns:a="http://schemas.openxmlformats.org/drawingml/2006/main">
             <a:pPr algn="l">
+              <a:buNone/>
               <a:defRPr sz="1125" b="0">
                 <a:solidFill>
                   <a:srgbClr val="60736B"/>
@@ -11483,6 +11610,7 @@
           <a:lstStyle xmlns:a="http://schemas.openxmlformats.org/drawingml/2006/main"/>
           <a:p xmlns:a="http://schemas.openxmlformats.org/drawingml/2006/main">
             <a:pPr algn="l">
+              <a:buNone/>
               <a:defRPr sz="1050" b="1">
                 <a:solidFill>
                   <a:srgbClr val="F2A93B"/>
@@ -11541,6 +11669,7 @@
           <a:lstStyle xmlns:a="http://schemas.openxmlformats.org/drawingml/2006/main"/>
           <a:p xmlns:a="http://schemas.openxmlformats.org/drawingml/2006/main">
             <a:pPr algn="l">
+              <a:buNone/>
               <a:defRPr sz="1650" b="1">
                 <a:solidFill>
                   <a:srgbClr val="FFFFFF"/>
@@ -11599,6 +11728,7 @@
           <a:lstStyle xmlns:a="http://schemas.openxmlformats.org/drawingml/2006/main"/>
           <a:p xmlns:a="http://schemas.openxmlformats.org/drawingml/2006/main">
             <a:pPr algn="l">
+              <a:buNone/>
               <a:defRPr sz="1125" b="0">
                 <a:solidFill>
                   <a:srgbClr val="CFE7DD"/>
@@ -11692,6 +11822,7 @@
           <a:lstStyle xmlns:a="http://schemas.openxmlformats.org/drawingml/2006/main"/>
           <a:p xmlns:a="http://schemas.openxmlformats.org/drawingml/2006/main">
             <a:pPr algn="l">
+              <a:buNone/>
               <a:defRPr sz="1050" b="1">
                 <a:solidFill>
                   <a:srgbClr val="0C9769"/>
@@ -11750,6 +11881,7 @@
           <a:lstStyle xmlns:a="http://schemas.openxmlformats.org/drawingml/2006/main"/>
           <a:p xmlns:a="http://schemas.openxmlformats.org/drawingml/2006/main">
             <a:pPr algn="l">
+              <a:buNone/>
               <a:defRPr sz="1650" b="1">
                 <a:solidFill>
                   <a:srgbClr val="102E24"/>
@@ -11808,6 +11940,7 @@
           <a:lstStyle xmlns:a="http://schemas.openxmlformats.org/drawingml/2006/main"/>
           <a:p xmlns:a="http://schemas.openxmlformats.org/drawingml/2006/main">
             <a:pPr algn="l">
+              <a:buNone/>
               <a:defRPr sz="1125" b="0">
                 <a:solidFill>
                   <a:srgbClr val="60736B"/>
@@ -11901,6 +12034,7 @@
           <a:lstStyle xmlns:a="http://schemas.openxmlformats.org/drawingml/2006/main"/>
           <a:p xmlns:a="http://schemas.openxmlformats.org/drawingml/2006/main">
             <a:pPr algn="l">
+              <a:buNone/>
               <a:defRPr sz="1050" b="1">
                 <a:solidFill>
                   <a:srgbClr val="0C9769"/>
@@ -11959,6 +12093,7 @@
           <a:lstStyle xmlns:a="http://schemas.openxmlformats.org/drawingml/2006/main"/>
           <a:p xmlns:a="http://schemas.openxmlformats.org/drawingml/2006/main">
             <a:pPr algn="l">
+              <a:buNone/>
               <a:defRPr sz="1650" b="1">
                 <a:solidFill>
                   <a:srgbClr val="102E24"/>
@@ -12017,6 +12152,7 @@
           <a:lstStyle xmlns:a="http://schemas.openxmlformats.org/drawingml/2006/main"/>
           <a:p xmlns:a="http://schemas.openxmlformats.org/drawingml/2006/main">
             <a:pPr algn="l">
+              <a:buNone/>
               <a:defRPr sz="1125" b="0">
                 <a:solidFill>
                   <a:srgbClr val="60736B"/>
@@ -12110,6 +12246,7 @@
           <a:lstStyle xmlns:a="http://schemas.openxmlformats.org/drawingml/2006/main"/>
           <a:p xmlns:a="http://schemas.openxmlformats.org/drawingml/2006/main">
             <a:pPr algn="l">
+              <a:buNone/>
               <a:defRPr sz="1050" b="1">
                 <a:solidFill>
                   <a:srgbClr val="0C9769"/>
@@ -12168,6 +12305,7 @@
           <a:lstStyle xmlns:a="http://schemas.openxmlformats.org/drawingml/2006/main"/>
           <a:p xmlns:a="http://schemas.openxmlformats.org/drawingml/2006/main">
             <a:pPr algn="l">
+              <a:buNone/>
               <a:defRPr sz="1650" b="1">
                 <a:solidFill>
                   <a:srgbClr val="102E24"/>
@@ -12226,6 +12364,7 @@
           <a:lstStyle xmlns:a="http://schemas.openxmlformats.org/drawingml/2006/main"/>
           <a:p xmlns:a="http://schemas.openxmlformats.org/drawingml/2006/main">
             <a:pPr algn="l">
+              <a:buNone/>
               <a:defRPr sz="1125" b="0">
                 <a:solidFill>
                   <a:srgbClr val="60736B"/>
@@ -12319,6 +12458,7 @@
           <a:lstStyle xmlns:a="http://schemas.openxmlformats.org/drawingml/2006/main"/>
           <a:p xmlns:a="http://schemas.openxmlformats.org/drawingml/2006/main">
             <a:pPr algn="l">
+              <a:buNone/>
               <a:defRPr sz="1050" b="1">
                 <a:solidFill>
                   <a:srgbClr val="A86200"/>
@@ -12377,6 +12517,7 @@
           <a:lstStyle xmlns:a="http://schemas.openxmlformats.org/drawingml/2006/main"/>
           <a:p xmlns:a="http://schemas.openxmlformats.org/drawingml/2006/main">
             <a:pPr algn="l">
+              <a:buNone/>
               <a:defRPr sz="1575" b="1">
                 <a:solidFill>
                   <a:srgbClr val="102E24"/>
@@ -12400,6 +12541,7 @@
           </a:p>
           <a:p xmlns:a="http://schemas.openxmlformats.org/drawingml/2006/main">
             <a:pPr algn="l">
+              <a:buNone/>
               <a:defRPr sz="1575" b="1">
                 <a:solidFill>
                   <a:srgbClr val="102E24"/>
@@ -12493,6 +12635,7 @@
           <a:lstStyle xmlns:a="http://schemas.openxmlformats.org/drawingml/2006/main"/>
           <a:p xmlns:a="http://schemas.openxmlformats.org/drawingml/2006/main">
             <a:pPr algn="l">
+              <a:buNone/>
               <a:defRPr sz="1125" b="1">
                 <a:solidFill>
                   <a:srgbClr val="4AA3A1"/>
@@ -12551,6 +12694,7 @@
           <a:lstStyle xmlns:a="http://schemas.openxmlformats.org/drawingml/2006/main"/>
           <a:p xmlns:a="http://schemas.openxmlformats.org/drawingml/2006/main">
             <a:pPr algn="l">
+              <a:buNone/>
               <a:defRPr sz="1425" b="1">
                 <a:solidFill>
                   <a:srgbClr val="102E24"/>
@@ -12638,6 +12782,7 @@
           <a:lstStyle xmlns:a="http://schemas.openxmlformats.org/drawingml/2006/main"/>
           <a:p xmlns:a="http://schemas.openxmlformats.org/drawingml/2006/main">
             <a:pPr algn="l">
+              <a:buNone/>
               <a:defRPr sz="1050" b="1">
                 <a:solidFill>
                   <a:srgbClr val="0C9769"/>
@@ -12696,6 +12841,7 @@
           <a:lstStyle xmlns:a="http://schemas.openxmlformats.org/drawingml/2006/main"/>
           <a:p xmlns:a="http://schemas.openxmlformats.org/drawingml/2006/main">
             <a:pPr algn="l">
+              <a:buNone/>
               <a:defRPr sz="3000" b="1">
                 <a:solidFill>
                   <a:srgbClr val="102E24"/>
@@ -12754,6 +12900,7 @@
           <a:lstStyle xmlns:a="http://schemas.openxmlformats.org/drawingml/2006/main"/>
           <a:p xmlns:a="http://schemas.openxmlformats.org/drawingml/2006/main">
             <a:pPr algn="r">
+              <a:buNone/>
               <a:defRPr sz="975" b="0">
                 <a:solidFill>
                   <a:srgbClr val="60736B"/>
@@ -12845,6 +12992,7 @@
           <a:lstStyle xmlns:a="http://schemas.openxmlformats.org/drawingml/2006/main"/>
           <a:p xmlns:a="http://schemas.openxmlformats.org/drawingml/2006/main">
             <a:pPr algn="l">
+              <a:buNone/>
               <a:defRPr sz="1125" b="1">
                 <a:solidFill>
                   <a:srgbClr val="C84A3A"/>
@@ -12903,6 +13051,7 @@
           <a:lstStyle xmlns:a="http://schemas.openxmlformats.org/drawingml/2006/main"/>
           <a:p xmlns:a="http://schemas.openxmlformats.org/drawingml/2006/main">
             <a:pPr algn="l">
+              <a:buNone/>
               <a:defRPr sz="1125" b="1">
                 <a:solidFill>
                   <a:srgbClr val="0C9769"/>
@@ -12961,6 +13110,7 @@
           <a:lstStyle xmlns:a="http://schemas.openxmlformats.org/drawingml/2006/main"/>
           <a:p xmlns:a="http://schemas.openxmlformats.org/drawingml/2006/main">
             <a:pPr algn="l">
+              <a:buNone/>
               <a:defRPr sz="1125" b="1">
                 <a:solidFill>
                   <a:srgbClr val="4AA3A1"/>
@@ -13054,6 +13204,7 @@
           <a:lstStyle xmlns:a="http://schemas.openxmlformats.org/drawingml/2006/main"/>
           <a:p xmlns:a="http://schemas.openxmlformats.org/drawingml/2006/main">
             <a:pPr algn="l">
+              <a:buNone/>
               <a:defRPr sz="1350" b="1">
                 <a:solidFill>
                   <a:srgbClr val="102E24"/>
@@ -13112,6 +13263,7 @@
           <a:lstStyle xmlns:a="http://schemas.openxmlformats.org/drawingml/2006/main"/>
           <a:p xmlns:a="http://schemas.openxmlformats.org/drawingml/2006/main">
             <a:pPr algn="ctr">
+              <a:buNone/>
               <a:defRPr sz="1800" b="1">
                 <a:solidFill>
                   <a:srgbClr val="F2A93B"/>
@@ -13170,6 +13322,7 @@
           <a:lstStyle xmlns:a="http://schemas.openxmlformats.org/drawingml/2006/main"/>
           <a:p xmlns:a="http://schemas.openxmlformats.org/drawingml/2006/main">
             <a:pPr algn="l">
+              <a:buNone/>
               <a:defRPr sz="1350" b="1">
                 <a:solidFill>
                   <a:srgbClr val="102E24"/>
@@ -13228,6 +13381,7 @@
           <a:lstStyle xmlns:a="http://schemas.openxmlformats.org/drawingml/2006/main"/>
           <a:p xmlns:a="http://schemas.openxmlformats.org/drawingml/2006/main">
             <a:pPr algn="ctr">
+              <a:buNone/>
               <a:defRPr sz="1800" b="1">
                 <a:solidFill>
                   <a:srgbClr val="F2A93B"/>
@@ -13286,6 +13440,7 @@
           <a:lstStyle xmlns:a="http://schemas.openxmlformats.org/drawingml/2006/main"/>
           <a:p xmlns:a="http://schemas.openxmlformats.org/drawingml/2006/main">
             <a:pPr algn="l">
+              <a:buNone/>
               <a:defRPr sz="1350" b="1">
                 <a:solidFill>
                   <a:srgbClr val="0A5D43"/>
@@ -13379,6 +13534,7 @@
           <a:lstStyle xmlns:a="http://schemas.openxmlformats.org/drawingml/2006/main"/>
           <a:p xmlns:a="http://schemas.openxmlformats.org/drawingml/2006/main">
             <a:pPr algn="l">
+              <a:buNone/>
               <a:defRPr sz="1350" b="1">
                 <a:solidFill>
                   <a:srgbClr val="102E24"/>
@@ -13437,6 +13593,7 @@
           <a:lstStyle xmlns:a="http://schemas.openxmlformats.org/drawingml/2006/main"/>
           <a:p xmlns:a="http://schemas.openxmlformats.org/drawingml/2006/main">
             <a:pPr algn="ctr">
+              <a:buNone/>
               <a:defRPr sz="1800" b="1">
                 <a:solidFill>
                   <a:srgbClr val="F2A93B"/>
@@ -13495,6 +13652,7 @@
           <a:lstStyle xmlns:a="http://schemas.openxmlformats.org/drawingml/2006/main"/>
           <a:p xmlns:a="http://schemas.openxmlformats.org/drawingml/2006/main">
             <a:pPr algn="l">
+              <a:buNone/>
               <a:defRPr sz="1350" b="1">
                 <a:solidFill>
                   <a:srgbClr val="102E24"/>
@@ -13553,6 +13711,7 @@
           <a:lstStyle xmlns:a="http://schemas.openxmlformats.org/drawingml/2006/main"/>
           <a:p xmlns:a="http://schemas.openxmlformats.org/drawingml/2006/main">
             <a:pPr algn="ctr">
+              <a:buNone/>
               <a:defRPr sz="1800" b="1">
                 <a:solidFill>
                   <a:srgbClr val="F2A93B"/>
@@ -13611,6 +13770,7 @@
           <a:lstStyle xmlns:a="http://schemas.openxmlformats.org/drawingml/2006/main"/>
           <a:p xmlns:a="http://schemas.openxmlformats.org/drawingml/2006/main">
             <a:pPr algn="l">
+              <a:buNone/>
               <a:defRPr sz="1350" b="1">
                 <a:solidFill>
                   <a:srgbClr val="0A5D43"/>
@@ -13704,6 +13864,7 @@
           <a:lstStyle xmlns:a="http://schemas.openxmlformats.org/drawingml/2006/main"/>
           <a:p xmlns:a="http://schemas.openxmlformats.org/drawingml/2006/main">
             <a:pPr algn="l">
+              <a:buNone/>
               <a:defRPr sz="1350" b="1">
                 <a:solidFill>
                   <a:srgbClr val="102E24"/>
@@ -13762,6 +13923,7 @@
           <a:lstStyle xmlns:a="http://schemas.openxmlformats.org/drawingml/2006/main"/>
           <a:p xmlns:a="http://schemas.openxmlformats.org/drawingml/2006/main">
             <a:pPr algn="ctr">
+              <a:buNone/>
               <a:defRPr sz="1800" b="1">
                 <a:solidFill>
                   <a:srgbClr val="F2A93B"/>
@@ -13820,6 +13982,7 @@
           <a:lstStyle xmlns:a="http://schemas.openxmlformats.org/drawingml/2006/main"/>
           <a:p xmlns:a="http://schemas.openxmlformats.org/drawingml/2006/main">
             <a:pPr algn="l">
+              <a:buNone/>
               <a:defRPr sz="1350" b="1">
                 <a:solidFill>
                   <a:srgbClr val="102E24"/>
@@ -13878,6 +14041,7 @@
           <a:lstStyle xmlns:a="http://schemas.openxmlformats.org/drawingml/2006/main"/>
           <a:p xmlns:a="http://schemas.openxmlformats.org/drawingml/2006/main">
             <a:pPr algn="ctr">
+              <a:buNone/>
               <a:defRPr sz="1800" b="1">
                 <a:solidFill>
                   <a:srgbClr val="F2A93B"/>
@@ -13936,6 +14100,7 @@
           <a:lstStyle xmlns:a="http://schemas.openxmlformats.org/drawingml/2006/main"/>
           <a:p xmlns:a="http://schemas.openxmlformats.org/drawingml/2006/main">
             <a:pPr algn="l">
+              <a:buNone/>
               <a:defRPr sz="1350" b="1">
                 <a:solidFill>
                   <a:srgbClr val="0A5D43"/>
@@ -14029,6 +14194,7 @@
           <a:lstStyle xmlns:a="http://schemas.openxmlformats.org/drawingml/2006/main"/>
           <a:p xmlns:a="http://schemas.openxmlformats.org/drawingml/2006/main">
             <a:pPr algn="l">
+              <a:buNone/>
               <a:defRPr sz="1350" b="1">
                 <a:solidFill>
                   <a:srgbClr val="102E24"/>
@@ -14087,6 +14253,7 @@
           <a:lstStyle xmlns:a="http://schemas.openxmlformats.org/drawingml/2006/main"/>
           <a:p xmlns:a="http://schemas.openxmlformats.org/drawingml/2006/main">
             <a:pPr algn="ctr">
+              <a:buNone/>
               <a:defRPr sz="1800" b="1">
                 <a:solidFill>
                   <a:srgbClr val="F2A93B"/>
@@ -14145,6 +14312,7 @@
           <a:lstStyle xmlns:a="http://schemas.openxmlformats.org/drawingml/2006/main"/>
           <a:p xmlns:a="http://schemas.openxmlformats.org/drawingml/2006/main">
             <a:pPr algn="l">
+              <a:buNone/>
               <a:defRPr sz="1350" b="1">
                 <a:solidFill>
                   <a:srgbClr val="102E24"/>
@@ -14203,6 +14371,7 @@
           <a:lstStyle xmlns:a="http://schemas.openxmlformats.org/drawingml/2006/main"/>
           <a:p xmlns:a="http://schemas.openxmlformats.org/drawingml/2006/main">
             <a:pPr algn="ctr">
+              <a:buNone/>
               <a:defRPr sz="1800" b="1">
                 <a:solidFill>
                   <a:srgbClr val="F2A93B"/>
@@ -14261,6 +14430,7 @@
           <a:lstStyle xmlns:a="http://schemas.openxmlformats.org/drawingml/2006/main"/>
           <a:p xmlns:a="http://schemas.openxmlformats.org/drawingml/2006/main">
             <a:pPr algn="l">
+              <a:buNone/>
               <a:defRPr sz="1350" b="1">
                 <a:solidFill>
                   <a:srgbClr val="0A5D43"/>
@@ -14319,6 +14489,7 @@
           <a:lstStyle xmlns:a="http://schemas.openxmlformats.org/drawingml/2006/main"/>
           <a:p xmlns:a="http://schemas.openxmlformats.org/drawingml/2006/main">
             <a:pPr algn="l">
+              <a:buNone/>
               <a:defRPr sz="1350" b="1">
                 <a:solidFill>
                   <a:srgbClr val="60736B"/>
@@ -14406,6 +14577,7 @@
           <a:lstStyle xmlns:a="http://schemas.openxmlformats.org/drawingml/2006/main"/>
           <a:p xmlns:a="http://schemas.openxmlformats.org/drawingml/2006/main">
             <a:pPr algn="l">
+              <a:buNone/>
               <a:defRPr sz="1050" b="1">
                 <a:solidFill>
                   <a:srgbClr val="0C9769"/>
@@ -14464,6 +14636,7 @@
           <a:lstStyle xmlns:a="http://schemas.openxmlformats.org/drawingml/2006/main"/>
           <a:p xmlns:a="http://schemas.openxmlformats.org/drawingml/2006/main">
             <a:pPr algn="l">
+              <a:buNone/>
               <a:defRPr sz="3000" b="1">
                 <a:solidFill>
                   <a:srgbClr val="102E24"/>
@@ -14522,6 +14695,7 @@
           <a:lstStyle xmlns:a="http://schemas.openxmlformats.org/drawingml/2006/main"/>
           <a:p xmlns:a="http://schemas.openxmlformats.org/drawingml/2006/main">
             <a:pPr algn="r">
+              <a:buNone/>
               <a:defRPr sz="975" b="0">
                 <a:solidFill>
                   <a:srgbClr val="60736B"/>
@@ -14613,6 +14787,7 @@
           <a:lstStyle xmlns:a="http://schemas.openxmlformats.org/drawingml/2006/main"/>
           <a:p xmlns:a="http://schemas.openxmlformats.org/drawingml/2006/main">
             <a:pPr algn="ctr">
+              <a:buNone/>
               <a:defRPr sz="1050" b="1">
                 <a:solidFill>
                   <a:srgbClr val="60736B"/>
@@ -14671,6 +14846,7 @@
           <a:lstStyle xmlns:a="http://schemas.openxmlformats.org/drawingml/2006/main"/>
           <a:p xmlns:a="http://schemas.openxmlformats.org/drawingml/2006/main">
             <a:pPr algn="ctr">
+              <a:buNone/>
               <a:defRPr sz="1050" b="1">
                 <a:solidFill>
                   <a:srgbClr val="60736B"/>
@@ -14729,6 +14905,7 @@
           <a:lstStyle xmlns:a="http://schemas.openxmlformats.org/drawingml/2006/main"/>
           <a:p xmlns:a="http://schemas.openxmlformats.org/drawingml/2006/main">
             <a:pPr algn="ctr">
+              <a:buNone/>
               <a:defRPr sz="1050" b="1">
                 <a:solidFill>
                   <a:srgbClr val="60736B"/>
@@ -14787,6 +14964,7 @@
           <a:lstStyle xmlns:a="http://schemas.openxmlformats.org/drawingml/2006/main"/>
           <a:p xmlns:a="http://schemas.openxmlformats.org/drawingml/2006/main">
             <a:pPr algn="ctr">
+              <a:buNone/>
               <a:defRPr sz="1050" b="1">
                 <a:solidFill>
                   <a:srgbClr val="60736B"/>
@@ -14845,6 +15023,7 @@
           <a:lstStyle xmlns:a="http://schemas.openxmlformats.org/drawingml/2006/main"/>
           <a:p xmlns:a="http://schemas.openxmlformats.org/drawingml/2006/main">
             <a:pPr algn="ctr">
+              <a:buNone/>
               <a:defRPr sz="1050" b="1">
                 <a:solidFill>
                   <a:srgbClr val="60736B"/>
@@ -14903,6 +15082,7 @@
           <a:lstStyle xmlns:a="http://schemas.openxmlformats.org/drawingml/2006/main"/>
           <a:p xmlns:a="http://schemas.openxmlformats.org/drawingml/2006/main">
             <a:pPr algn="ctr">
+              <a:buNone/>
               <a:defRPr sz="1050" b="1">
                 <a:solidFill>
                   <a:srgbClr val="60736B"/>
@@ -14961,6 +15141,7 @@
           <a:lstStyle xmlns:a="http://schemas.openxmlformats.org/drawingml/2006/main"/>
           <a:p xmlns:a="http://schemas.openxmlformats.org/drawingml/2006/main">
             <a:pPr algn="ctr">
+              <a:buNone/>
               <a:defRPr sz="1050" b="1">
                 <a:solidFill>
                   <a:srgbClr val="60736B"/>
@@ -15019,6 +15200,7 @@
           <a:lstStyle xmlns:a="http://schemas.openxmlformats.org/drawingml/2006/main"/>
           <a:p xmlns:a="http://schemas.openxmlformats.org/drawingml/2006/main">
             <a:pPr algn="l">
+              <a:buNone/>
               <a:defRPr sz="1350" b="1">
                 <a:solidFill>
                   <a:srgbClr val="102E24"/>
@@ -15145,6 +15327,7 @@
           <a:lstStyle xmlns:a="http://schemas.openxmlformats.org/drawingml/2006/main"/>
           <a:p xmlns:a="http://schemas.openxmlformats.org/drawingml/2006/main">
             <a:pPr algn="l">
+              <a:buNone/>
               <a:defRPr sz="1350" b="1">
                 <a:solidFill>
                   <a:srgbClr val="102E24"/>
@@ -15271,6 +15454,7 @@
           <a:lstStyle xmlns:a="http://schemas.openxmlformats.org/drawingml/2006/main"/>
           <a:p xmlns:a="http://schemas.openxmlformats.org/drawingml/2006/main">
             <a:pPr algn="l">
+              <a:buNone/>
               <a:defRPr sz="1350" b="1">
                 <a:solidFill>
                   <a:srgbClr val="102E24"/>
@@ -15397,6 +15581,7 @@
           <a:lstStyle xmlns:a="http://schemas.openxmlformats.org/drawingml/2006/main"/>
           <a:p xmlns:a="http://schemas.openxmlformats.org/drawingml/2006/main">
             <a:pPr algn="l">
+              <a:buNone/>
               <a:defRPr sz="1350" b="1">
                 <a:solidFill>
                   <a:srgbClr val="102E24"/>
@@ -15523,6 +15708,7 @@
           <a:lstStyle xmlns:a="http://schemas.openxmlformats.org/drawingml/2006/main"/>
           <a:p xmlns:a="http://schemas.openxmlformats.org/drawingml/2006/main">
             <a:pPr algn="l">
+              <a:buNone/>
               <a:defRPr sz="1350" b="1">
                 <a:solidFill>
                   <a:srgbClr val="102E24"/>
@@ -15649,6 +15835,7 @@
           <a:lstStyle xmlns:a="http://schemas.openxmlformats.org/drawingml/2006/main"/>
           <a:p xmlns:a="http://schemas.openxmlformats.org/drawingml/2006/main">
             <a:pPr algn="l">
+              <a:buNone/>
               <a:defRPr sz="1350" b="1">
                 <a:solidFill>
                   <a:srgbClr val="102E24"/>
@@ -15810,6 +15997,7 @@
           <a:lstStyle xmlns:a="http://schemas.openxmlformats.org/drawingml/2006/main"/>
           <a:p xmlns:a="http://schemas.openxmlformats.org/drawingml/2006/main">
             <a:pPr algn="ctr">
+              <a:buNone/>
               <a:defRPr sz="1200" b="1">
                 <a:solidFill>
                   <a:srgbClr val="102E24"/>
